--- a/index/designs/y8-l7/l8-characters-review/l8-characters-review.pptx
+++ b/index/designs/y8-l7/l8-characters-review/l8-characters-review.pptx
@@ -2194,15 +2194,6 @@
               </a:rPr>
               <a:t>汉字</a:t>
             </a:r>
-            <a:pPr algn="ctr" indent="0" marL="0">
-              <a:lnSpc>
-                <a:spcPts val="8000"/>
-              </a:lnSpc>
-              <a:spcAft>
-                <a:spcPts val="1000"/>
-              </a:spcAft>
-              <a:buNone/>
-            </a:pPr>
             <a:r>
               <a:rPr lang="en-US" sz="8000" b="1" dirty="0">
                 <a:solidFill>
@@ -2214,15 +2205,6 @@
               </a:rPr>
               <a:t>·</a:t>
             </a:r>
-            <a:pPr algn="ctr" indent="0" marL="0">
-              <a:lnSpc>
-                <a:spcPts val="8000"/>
-              </a:lnSpc>
-              <a:spcAft>
-                <a:spcPts val="1000"/>
-              </a:spcAft>
-              <a:buNone/>
-            </a:pPr>
             <a:r>
               <a:rPr lang="en-US" sz="8000" dirty="0">
                 <a:solidFill>
@@ -2878,9 +2860,6 @@
               </a:rPr>
               <a:t>Write a caption for each picture — use at least one grammar structure across the 4 captions · Include </a:t>
             </a:r>
-            <a:pPr algn="l" indent="0" marL="0">
-              <a:buNone/>
-            </a:pPr>
             <a:r>
               <a:rPr lang="en-US" sz="1000" b="1" dirty="0">
                 <a:solidFill>
@@ -2892,9 +2871,6 @@
               </a:rPr>
               <a:t>one 正在 sentence</a:t>
             </a:r>
-            <a:pPr algn="l" indent="0" marL="0">
-              <a:buNone/>
-            </a:pPr>
             <a:r>
               <a:rPr lang="en-US" sz="1000" dirty="0">
                 <a:solidFill>
@@ -2906,9 +2882,6 @@
               </a:rPr>
               <a:t> &amp; </a:t>
             </a:r>
-            <a:pPr algn="l" indent="0" marL="0">
-              <a:buNone/>
-            </a:pPr>
             <a:r>
               <a:rPr lang="en-US" sz="1000" b="1" dirty="0">
                 <a:solidFill>
@@ -3111,12 +3084,6 @@
               </a:rPr>
               <a:t>画画儿</a:t>
             </a:r>
-            <a:pPr algn="ctr" indent="0" marL="0">
-              <a:lnSpc>
-                <a:spcPts val="1560"/>
-              </a:lnSpc>
-              <a:buNone/>
-            </a:pPr>
             <a:r>
               <a:rPr lang="en-US" sz="1000" dirty="0">
                 <a:solidFill>
@@ -3365,12 +3332,6 @@
               </a:rPr>
               <a:t>读书</a:t>
             </a:r>
-            <a:pPr algn="ctr" indent="0" marL="0">
-              <a:lnSpc>
-                <a:spcPts val="1560"/>
-              </a:lnSpc>
-              <a:buNone/>
-            </a:pPr>
             <a:r>
               <a:rPr lang="en-US" sz="1000" dirty="0">
                 <a:solidFill>
@@ -3619,12 +3580,6 @@
               </a:rPr>
               <a:t>弹吉他 + 唱歌</a:t>
             </a:r>
-            <a:pPr algn="ctr" indent="0" marL="0">
-              <a:lnSpc>
-                <a:spcPts val="1560"/>
-              </a:lnSpc>
-              <a:buNone/>
-            </a:pPr>
             <a:r>
               <a:rPr lang="en-US" sz="1000" dirty="0">
                 <a:solidFill>
@@ -3873,12 +3828,6 @@
               </a:rPr>
               <a:t>看电视</a:t>
             </a:r>
-            <a:pPr algn="ctr" indent="0" marL="0">
-              <a:lnSpc>
-                <a:spcPts val="1560"/>
-              </a:lnSpc>
-              <a:buNone/>
-            </a:pPr>
             <a:r>
               <a:rPr lang="en-US" sz="1000" dirty="0">
                 <a:solidFill>
@@ -4103,9 +4052,6 @@
               </a:rPr>
               <a:t>正在</a:t>
             </a:r>
-            <a:pPr algn="l" indent="0" marL="0">
-              <a:buNone/>
-            </a:pPr>
             <a:r>
               <a:rPr lang="en-US" sz="1100" dirty="0">
                 <a:solidFill>
@@ -4192,9 +4138,6 @@
               </a:rPr>
               <a:t>喜欢</a:t>
             </a:r>
-            <a:pPr algn="l" indent="0" marL="0">
-              <a:buNone/>
-            </a:pPr>
             <a:r>
               <a:rPr lang="en-US" sz="1100" dirty="0">
                 <a:solidFill>
@@ -4281,9 +4224,6 @@
               </a:rPr>
               <a:t>每天</a:t>
             </a:r>
-            <a:pPr algn="l" indent="0" marL="0">
-              <a:buNone/>
-            </a:pPr>
             <a:r>
               <a:rPr lang="en-US" sz="1100" dirty="0">
                 <a:solidFill>
@@ -4295,9 +4235,6 @@
               </a:rPr>
               <a:t>的</a:t>
             </a:r>
-            <a:pPr algn="l" indent="0" marL="0">
-              <a:buNone/>
-            </a:pPr>
             <a:r>
               <a:rPr lang="en-US" sz="1100" dirty="0">
                 <a:solidFill>
@@ -4384,9 +4321,6 @@
               </a:rPr>
               <a:t>、</a:t>
             </a:r>
-            <a:pPr algn="l" indent="0" marL="0">
-              <a:buNone/>
-            </a:pPr>
             <a:r>
               <a:rPr lang="en-US" sz="1100" dirty="0">
                 <a:solidFill>
@@ -4398,9 +4332,6 @@
               </a:rPr>
               <a:t>，他都</a:t>
             </a:r>
-            <a:pPr algn="l" indent="0" marL="0">
-              <a:buNone/>
-            </a:pPr>
             <a:r>
               <a:rPr lang="en-US" sz="1100" dirty="0">
                 <a:solidFill>
@@ -5466,12 +5397,6 @@
               </a:rPr>
               <a:t>4–6 sentences</a:t>
             </a:r>
-            <a:pPr algn="l" indent="0" marL="0">
-              <a:lnSpc>
-                <a:spcPts val="1485"/>
-              </a:lnSpc>
-              <a:buNone/>
-            </a:pPr>
             <a:r>
               <a:rPr lang="en-US" sz="1100" dirty="0">
                 <a:solidFill>
@@ -5600,12 +5525,6 @@
               </a:rPr>
               <a:t>Use </a:t>
             </a:r>
-            <a:pPr algn="l" indent="0" marL="0">
-              <a:lnSpc>
-                <a:spcPts val="1485"/>
-              </a:lnSpc>
-              <a:buNone/>
-            </a:pPr>
             <a:r>
               <a:rPr lang="en-US" sz="1100" b="1" dirty="0">
                 <a:solidFill>
@@ -5617,12 +5536,6 @@
               </a:rPr>
               <a:t>≥2 of the 4</a:t>
             </a:r>
-            <a:pPr algn="l" indent="0" marL="0">
-              <a:lnSpc>
-                <a:spcPts val="1485"/>
-              </a:lnSpc>
-              <a:buNone/>
-            </a:pPr>
             <a:r>
               <a:rPr lang="en-US" sz="1100" dirty="0">
                 <a:solidFill>
@@ -5751,12 +5664,6 @@
               </a:rPr>
               <a:t>Use </a:t>
             </a:r>
-            <a:pPr algn="l" indent="0" marL="0">
-              <a:lnSpc>
-                <a:spcPts val="1485"/>
-              </a:lnSpc>
-              <a:buNone/>
-            </a:pPr>
             <a:r>
               <a:rPr lang="en-US" sz="1100" b="1" dirty="0">
                 <a:solidFill>
@@ -6097,6 +6004,53 @@
               </a:rPr>
               <a:t>我有很多爱好。我喜欢</a:t>
             </a:r>
+            <a:r>
+              <a:rPr lang="en-US" sz="1100" b="1" dirty="0">
+                <a:solidFill>
+                  <a:srgbClr val="3A7D8C"/>
+                </a:solidFill>
+                <a:latin typeface="Noto Serif SC" pitchFamily="34" charset="0"/>
+                <a:ea typeface="Noto Serif SC" pitchFamily="34" charset="-122"/>
+                <a:cs typeface="Noto Serif SC" pitchFamily="34" charset="-120"/>
+              </a:rPr>
+              <a:t>一边</a:t>
+            </a:r>
+            <a:r>
+              <a:rPr lang="en-US" sz="1100" dirty="0">
+                <a:solidFill>
+                  <a:srgbClr val="5B6677"/>
+                </a:solidFill>
+                <a:latin typeface="Noto Serif SC" pitchFamily="34" charset="0"/>
+                <a:ea typeface="Noto Serif SC" pitchFamily="34" charset="-122"/>
+                <a:cs typeface="Noto Serif SC" pitchFamily="34" charset="-120"/>
+              </a:rPr>
+              <a:t>听音乐，</a:t>
+            </a:r>
+            <a:r>
+              <a:rPr lang="en-US" sz="1100" b="1" dirty="0">
+                <a:solidFill>
+                  <a:srgbClr val="3A7D8C"/>
+                </a:solidFill>
+                <a:latin typeface="Noto Serif SC" pitchFamily="34" charset="0"/>
+                <a:ea typeface="Noto Serif SC" pitchFamily="34" charset="-122"/>
+                <a:cs typeface="Noto Serif SC" pitchFamily="34" charset="-120"/>
+              </a:rPr>
+              <a:t>一边</a:t>
+            </a:r>
+            <a:r>
+              <a:rPr lang="en-US" sz="1100" dirty="0">
+                <a:solidFill>
+                  <a:srgbClr val="5B6677"/>
+                </a:solidFill>
+                <a:latin typeface="Noto Serif SC" pitchFamily="34" charset="0"/>
+                <a:ea typeface="Noto Serif SC" pitchFamily="34" charset="-122"/>
+                <a:cs typeface="Noto Serif SC" pitchFamily="34" charset="-120"/>
+              </a:rPr>
+              <a:t>画画儿。</a:t>
+            </a:r>
+            <a:endParaRPr lang="en-US" sz="1100" dirty="0"/>
+          </a:p>
+          <a:p>
             <a:pPr algn="l" indent="0" marL="0">
               <a:lnSpc>
                 <a:spcPts val="2090"/>
@@ -6104,16 +6058,19 @@
               <a:buNone/>
             </a:pPr>
             <a:r>
-              <a:rPr lang="en-US" sz="1100" b="1" dirty="0">
-                <a:solidFill>
-                  <a:srgbClr val="3A7D8C"/>
+              <a:rPr lang="en-US" sz="1100" dirty="0">
+                <a:solidFill>
+                  <a:srgbClr val="5B6677"/>
                 </a:solidFill>
                 <a:latin typeface="Noto Serif SC" pitchFamily="34" charset="0"/>
                 <a:ea typeface="Noto Serif SC" pitchFamily="34" charset="-122"/>
                 <a:cs typeface="Noto Serif SC" pitchFamily="34" charset="-120"/>
               </a:rPr>
-              <a:t>一边</a:t>
-            </a:r>
+              <a:t> 油画儿、国画儿，我</a:t>
+            </a:r>
+            <a:endParaRPr lang="en-US" sz="1100" dirty="0"/>
+          </a:p>
+          <a:p>
             <a:pPr algn="l" indent="0" marL="0">
               <a:lnSpc>
                 <a:spcPts val="2090"/>
@@ -6121,16 +6078,52 @@
               <a:buNone/>
             </a:pPr>
             <a:r>
-              <a:rPr lang="en-US" sz="1100" dirty="0">
-                <a:solidFill>
-                  <a:srgbClr val="5B6677"/>
+              <a:rPr lang="en-US" sz="1100" b="1" dirty="0">
+                <a:solidFill>
+                  <a:srgbClr val="C8943E"/>
                 </a:solidFill>
                 <a:latin typeface="Noto Serif SC" pitchFamily="34" charset="0"/>
                 <a:ea typeface="Noto Serif SC" pitchFamily="34" charset="-122"/>
                 <a:cs typeface="Noto Serif SC" pitchFamily="34" charset="-120"/>
               </a:rPr>
-              <a:t>听音乐，</a:t>
-            </a:r>
+              <a:t>都</a:t>
+            </a:r>
+            <a:r>
+              <a:rPr lang="en-US" sz="1100" dirty="0">
+                <a:solidFill>
+                  <a:srgbClr val="5B6677"/>
+                </a:solidFill>
+                <a:latin typeface="Noto Serif SC" pitchFamily="34" charset="0"/>
+                <a:ea typeface="Noto Serif SC" pitchFamily="34" charset="-122"/>
+                <a:cs typeface="Noto Serif SC" pitchFamily="34" charset="-120"/>
+              </a:rPr>
+              <a:t>喜欢画。我每天画</a:t>
+            </a:r>
+            <a:r>
+              <a:rPr lang="en-US" sz="1100" b="1" dirty="0">
+                <a:solidFill>
+                  <a:srgbClr val="D4756B"/>
+                </a:solidFill>
+                <a:latin typeface="Noto Serif SC" pitchFamily="34" charset="0"/>
+                <a:ea typeface="Noto Serif SC" pitchFamily="34" charset="-122"/>
+                <a:cs typeface="Noto Serif SC" pitchFamily="34" charset="-120"/>
+              </a:rPr>
+              <a:t>半个小时</a:t>
+            </a:r>
+            <a:r>
+              <a:rPr lang="en-US" sz="1100" dirty="0">
+                <a:solidFill>
+                  <a:srgbClr val="5B6677"/>
+                </a:solidFill>
+                <a:latin typeface="Noto Serif SC" pitchFamily="34" charset="0"/>
+                <a:ea typeface="Noto Serif SC" pitchFamily="34" charset="-122"/>
+                <a:cs typeface="Noto Serif SC" pitchFamily="34" charset="-120"/>
+              </a:rPr>
+              <a:t>的画儿。</a:t>
+            </a:r>
+            <a:endParaRPr lang="en-US" sz="1100" dirty="0"/>
+          </a:p>
+          <a:p>
             <a:pPr algn="l" indent="0" marL="0">
               <a:lnSpc>
                 <a:spcPts val="2090"/>
@@ -6138,16 +6131,19 @@
               <a:buNone/>
             </a:pPr>
             <a:r>
-              <a:rPr lang="en-US" sz="1100" b="1" dirty="0">
-                <a:solidFill>
-                  <a:srgbClr val="3A7D8C"/>
+              <a:rPr lang="en-US" sz="1100" dirty="0">
+                <a:solidFill>
+                  <a:srgbClr val="5B6677"/>
                 </a:solidFill>
                 <a:latin typeface="Noto Serif SC" pitchFamily="34" charset="0"/>
                 <a:ea typeface="Noto Serif SC" pitchFamily="34" charset="-122"/>
                 <a:cs typeface="Noto Serif SC" pitchFamily="34" charset="-120"/>
               </a:rPr>
-              <a:t>一边</a:t>
-            </a:r>
+              <a:t> 我现在</a:t>
+            </a:r>
+            <a:endParaRPr lang="en-US" sz="1100" dirty="0"/>
+          </a:p>
+          <a:p>
             <a:pPr algn="l" indent="0" marL="0">
               <a:lnSpc>
                 <a:spcPts val="2090"/>
@@ -6155,25 +6151,16 @@
               <a:buNone/>
             </a:pPr>
             <a:r>
-              <a:rPr lang="en-US" sz="1100" dirty="0">
-                <a:solidFill>
-                  <a:srgbClr val="5B6677"/>
+              <a:rPr lang="en-US" sz="1100" b="1" dirty="0">
+                <a:solidFill>
+                  <a:srgbClr val="3A8A55"/>
                 </a:solidFill>
                 <a:latin typeface="Noto Serif SC" pitchFamily="34" charset="0"/>
                 <a:ea typeface="Noto Serif SC" pitchFamily="34" charset="-122"/>
                 <a:cs typeface="Noto Serif SC" pitchFamily="34" charset="-120"/>
               </a:rPr>
-              <a:t>画画儿。</a:t>
-            </a:r>
-            <a:endParaRPr lang="en-US" sz="1100" dirty="0"/>
-          </a:p>
-          <a:p>
-            <a:pPr algn="l" indent="0" marL="0">
-              <a:lnSpc>
-                <a:spcPts val="2090"/>
-              </a:lnSpc>
-              <a:buNone/>
-            </a:pPr>
+              <a:t>正在</a:t>
+            </a:r>
             <a:r>
               <a:rPr lang="en-US" sz="1100" dirty="0">
                 <a:solidFill>
@@ -6183,159 +6170,19 @@
                 <a:ea typeface="Noto Serif SC" pitchFamily="34" charset="-122"/>
                 <a:cs typeface="Noto Serif SC" pitchFamily="34" charset="-120"/>
               </a:rPr>
-              <a:t> 油画儿、国画儿，我</a:t>
-            </a:r>
-            <a:endParaRPr lang="en-US" sz="1100" dirty="0"/>
-          </a:p>
-          <a:p>
-            <a:pPr algn="l" indent="0" marL="0">
-              <a:lnSpc>
-                <a:spcPts val="2090"/>
-              </a:lnSpc>
-              <a:buNone/>
-            </a:pPr>
+              <a:t>学画国画儿。我每天读</a:t>
+            </a:r>
             <a:r>
               <a:rPr lang="en-US" sz="1100" b="1" dirty="0">
                 <a:solidFill>
-                  <a:srgbClr val="C8943E"/>
+                  <a:srgbClr val="D4756B"/>
                 </a:solidFill>
                 <a:latin typeface="Noto Serif SC" pitchFamily="34" charset="0"/>
                 <a:ea typeface="Noto Serif SC" pitchFamily="34" charset="-122"/>
                 <a:cs typeface="Noto Serif SC" pitchFamily="34" charset="-120"/>
               </a:rPr>
-              <a:t>都</a:t>
-            </a:r>
-            <a:pPr algn="l" indent="0" marL="0">
-              <a:lnSpc>
-                <a:spcPts val="2090"/>
-              </a:lnSpc>
-              <a:buNone/>
-            </a:pPr>
-            <a:r>
-              <a:rPr lang="en-US" sz="1100" dirty="0">
-                <a:solidFill>
-                  <a:srgbClr val="5B6677"/>
-                </a:solidFill>
-                <a:latin typeface="Noto Serif SC" pitchFamily="34" charset="0"/>
-                <a:ea typeface="Noto Serif SC" pitchFamily="34" charset="-122"/>
-                <a:cs typeface="Noto Serif SC" pitchFamily="34" charset="-120"/>
-              </a:rPr>
-              <a:t>喜欢画。我每天画</a:t>
-            </a:r>
-            <a:pPr algn="l" indent="0" marL="0">
-              <a:lnSpc>
-                <a:spcPts val="2090"/>
-              </a:lnSpc>
-              <a:buNone/>
-            </a:pPr>
-            <a:r>
-              <a:rPr lang="en-US" sz="1100" b="1" dirty="0">
-                <a:solidFill>
-                  <a:srgbClr val="D4756B"/>
-                </a:solidFill>
-                <a:latin typeface="Noto Serif SC" pitchFamily="34" charset="0"/>
-                <a:ea typeface="Noto Serif SC" pitchFamily="34" charset="-122"/>
-                <a:cs typeface="Noto Serif SC" pitchFamily="34" charset="-120"/>
-              </a:rPr>
-              <a:t>半个小时</a:t>
-            </a:r>
-            <a:pPr algn="l" indent="0" marL="0">
-              <a:lnSpc>
-                <a:spcPts val="2090"/>
-              </a:lnSpc>
-              <a:buNone/>
-            </a:pPr>
-            <a:r>
-              <a:rPr lang="en-US" sz="1100" dirty="0">
-                <a:solidFill>
-                  <a:srgbClr val="5B6677"/>
-                </a:solidFill>
-                <a:latin typeface="Noto Serif SC" pitchFamily="34" charset="0"/>
-                <a:ea typeface="Noto Serif SC" pitchFamily="34" charset="-122"/>
-                <a:cs typeface="Noto Serif SC" pitchFamily="34" charset="-120"/>
-              </a:rPr>
-              <a:t>的画儿。</a:t>
-            </a:r>
-            <a:endParaRPr lang="en-US" sz="1100" dirty="0"/>
-          </a:p>
-          <a:p>
-            <a:pPr algn="l" indent="0" marL="0">
-              <a:lnSpc>
-                <a:spcPts val="2090"/>
-              </a:lnSpc>
-              <a:buNone/>
-            </a:pPr>
-            <a:r>
-              <a:rPr lang="en-US" sz="1100" dirty="0">
-                <a:solidFill>
-                  <a:srgbClr val="5B6677"/>
-                </a:solidFill>
-                <a:latin typeface="Noto Serif SC" pitchFamily="34" charset="0"/>
-                <a:ea typeface="Noto Serif SC" pitchFamily="34" charset="-122"/>
-                <a:cs typeface="Noto Serif SC" pitchFamily="34" charset="-120"/>
-              </a:rPr>
-              <a:t> 我现在</a:t>
-            </a:r>
-            <a:endParaRPr lang="en-US" sz="1100" dirty="0"/>
-          </a:p>
-          <a:p>
-            <a:pPr algn="l" indent="0" marL="0">
-              <a:lnSpc>
-                <a:spcPts val="2090"/>
-              </a:lnSpc>
-              <a:buNone/>
-            </a:pPr>
-            <a:r>
-              <a:rPr lang="en-US" sz="1100" b="1" dirty="0">
-                <a:solidFill>
-                  <a:srgbClr val="3A8A55"/>
-                </a:solidFill>
-                <a:latin typeface="Noto Serif SC" pitchFamily="34" charset="0"/>
-                <a:ea typeface="Noto Serif SC" pitchFamily="34" charset="-122"/>
-                <a:cs typeface="Noto Serif SC" pitchFamily="34" charset="-120"/>
-              </a:rPr>
-              <a:t>正在</a:t>
-            </a:r>
-            <a:pPr algn="l" indent="0" marL="0">
-              <a:lnSpc>
-                <a:spcPts val="2090"/>
-              </a:lnSpc>
-              <a:buNone/>
-            </a:pPr>
-            <a:r>
-              <a:rPr lang="en-US" sz="1100" dirty="0">
-                <a:solidFill>
-                  <a:srgbClr val="5B6677"/>
-                </a:solidFill>
-                <a:latin typeface="Noto Serif SC" pitchFamily="34" charset="0"/>
-                <a:ea typeface="Noto Serif SC" pitchFamily="34" charset="-122"/>
-                <a:cs typeface="Noto Serif SC" pitchFamily="34" charset="-120"/>
-              </a:rPr>
-              <a:t>学画国画儿。我每天读</a:t>
-            </a:r>
-            <a:pPr algn="l" indent="0" marL="0">
-              <a:lnSpc>
-                <a:spcPts val="2090"/>
-              </a:lnSpc>
-              <a:buNone/>
-            </a:pPr>
-            <a:r>
-              <a:rPr lang="en-US" sz="1100" b="1" dirty="0">
-                <a:solidFill>
-                  <a:srgbClr val="D4756B"/>
-                </a:solidFill>
-                <a:latin typeface="Noto Serif SC" pitchFamily="34" charset="0"/>
-                <a:ea typeface="Noto Serif SC" pitchFamily="34" charset="-122"/>
-                <a:cs typeface="Noto Serif SC" pitchFamily="34" charset="-120"/>
-              </a:rPr>
               <a:t>一个小时</a:t>
             </a:r>
-            <a:pPr algn="l" indent="0" marL="0">
-              <a:lnSpc>
-                <a:spcPts val="2090"/>
-              </a:lnSpc>
-              <a:buNone/>
-            </a:pPr>
             <a:r>
               <a:rPr lang="en-US" sz="1100" dirty="0">
                 <a:solidFill>
@@ -7958,12 +7805,6 @@
               </a:rPr>
               <a:t>I can write and recognise the 4 simple characters: </a:t>
             </a:r>
-            <a:pPr algn="l" indent="0" marL="0">
-              <a:lnSpc>
-                <a:spcPts val="1540"/>
-              </a:lnSpc>
-              <a:buNone/>
-            </a:pPr>
             <a:r>
               <a:rPr lang="en-US" sz="1100" b="1" dirty="0">
                 <a:solidFill>
@@ -8199,12 +8040,6 @@
               </a:rPr>
               <a:t>I can write a paragraph about my hobbies using </a:t>
             </a:r>
-            <a:pPr algn="l" indent="0" marL="0">
-              <a:lnSpc>
-                <a:spcPts val="1540"/>
-              </a:lnSpc>
-              <a:buNone/>
-            </a:pPr>
             <a:r>
               <a:rPr lang="en-US" sz="1100" b="1" dirty="0">
                 <a:solidFill>
@@ -8216,12 +8051,6 @@
               </a:rPr>
               <a:t>≥2</a:t>
             </a:r>
-            <a:pPr algn="l" indent="0" marL="0">
-              <a:lnSpc>
-                <a:spcPts val="1540"/>
-              </a:lnSpc>
-              <a:buNone/>
-            </a:pPr>
             <a:r>
               <a:rPr lang="en-US" sz="1100" dirty="0">
                 <a:solidFill>
@@ -8887,12 +8716,6 @@
               </a:rPr>
               <a:t>I used </a:t>
             </a:r>
-            <a:pPr algn="l" indent="0" marL="0">
-              <a:lnSpc>
-                <a:spcPts val="1540"/>
-              </a:lnSpc>
-              <a:buNone/>
-            </a:pPr>
             <a:r>
               <a:rPr lang="en-US" sz="1100" dirty="0">
                 <a:solidFill>
@@ -9069,15 +8892,6 @@
               </a:rPr>
               <a:t>Write </a:t>
             </a:r>
-            <a:pPr algn="l" indent="0" marL="0">
-              <a:lnSpc>
-                <a:spcPts val="1620"/>
-              </a:lnSpc>
-              <a:spcAft>
-                <a:spcPts val="800"/>
-              </a:spcAft>
-              <a:buNone/>
-            </a:pPr>
             <a:r>
               <a:rPr lang="en-US" sz="1200" b="1" dirty="0">
                 <a:solidFill>
@@ -9089,15 +8903,6 @@
               </a:rPr>
               <a:t>one</a:t>
             </a:r>
-            <a:pPr algn="l" indent="0" marL="0">
-              <a:lnSpc>
-                <a:spcPts val="1620"/>
-              </a:lnSpc>
-              <a:spcAft>
-                <a:spcPts val="800"/>
-              </a:spcAft>
-              <a:buNone/>
-            </a:pPr>
             <a:r>
               <a:rPr lang="en-US" sz="1200" dirty="0">
                 <a:solidFill>
@@ -10774,9 +10579,6 @@
               </a:rPr>
               <a:t>New action verbs · new sport nouns · new contexts — </a:t>
             </a:r>
-            <a:pPr algn="ctr" indent="0" marL="0">
-              <a:buNone/>
-            </a:pPr>
             <a:r>
               <a:rPr lang="en-US" sz="1100" b="1" dirty="0">
                 <a:solidFill>
@@ -13149,12 +12951,6 @@
               </a:rPr>
               <a:t>We are learning to write </a:t>
             </a:r>
-            <a:pPr algn="l" indent="0" marL="0">
-              <a:lnSpc>
-                <a:spcPts val="1960"/>
-              </a:lnSpc>
-              <a:buNone/>
-            </a:pPr>
             <a:r>
               <a:rPr lang="en-US" sz="1400" b="1" dirty="0">
                 <a:solidFill>
@@ -13166,12 +12962,6 @@
               </a:rPr>
               <a:t>simple Chinese characters</a:t>
             </a:r>
-            <a:pPr algn="l" indent="0" marL="0">
-              <a:lnSpc>
-                <a:spcPts val="1960"/>
-              </a:lnSpc>
-              <a:buNone/>
-            </a:pPr>
             <a:r>
               <a:rPr lang="en-US" sz="1400" dirty="0">
                 <a:solidFill>
@@ -13183,12 +12973,6 @@
               </a:rPr>
               <a:t> and consolidate all Lesson 7 language in </a:t>
             </a:r>
-            <a:pPr algn="l" indent="0" marL="0">
-              <a:lnSpc>
-                <a:spcPts val="1960"/>
-              </a:lnSpc>
-              <a:buNone/>
-            </a:pPr>
             <a:r>
               <a:rPr lang="en-US" sz="1400" b="1" dirty="0">
                 <a:solidFill>
@@ -13315,12 +13099,6 @@
               </a:rPr>
               <a:t>Write and recognise the </a:t>
             </a:r>
-            <a:pPr algn="l" indent="0" marL="0">
-              <a:lnSpc>
-                <a:spcPts val="1680"/>
-              </a:lnSpc>
-              <a:buNone/>
-            </a:pPr>
             <a:r>
               <a:rPr lang="en-US" sz="1200" b="1" dirty="0">
                 <a:solidFill>
@@ -13332,12 +13110,6 @@
               </a:rPr>
               <a:t>4 simple characters</a:t>
             </a:r>
-            <a:pPr algn="l" indent="0" marL="0">
-              <a:lnSpc>
-                <a:spcPts val="1680"/>
-              </a:lnSpc>
-              <a:buNone/>
-            </a:pPr>
             <a:r>
               <a:rPr lang="en-US" sz="1200" dirty="0">
                 <a:solidFill>
@@ -13349,12 +13121,6 @@
               </a:rPr>
               <a:t>: </a:t>
             </a:r>
-            <a:pPr algn="l" indent="0" marL="0">
-              <a:lnSpc>
-                <a:spcPts val="1680"/>
-              </a:lnSpc>
-              <a:buNone/>
-            </a:pPr>
             <a:r>
               <a:rPr lang="en-US" sz="1200" dirty="0">
                 <a:solidFill>
@@ -13481,12 +13247,6 @@
               </a:rPr>
               <a:t>Write picture captions using Lesson 7 vocabulary and structures — e.g. </a:t>
             </a:r>
-            <a:pPr algn="l" indent="0" marL="0">
-              <a:lnSpc>
-                <a:spcPts val="1680"/>
-              </a:lnSpc>
-              <a:buNone/>
-            </a:pPr>
             <a:r>
               <a:rPr lang="en-US" sz="1200" dirty="0">
                 <a:solidFill>
@@ -13613,12 +13373,6 @@
               </a:rPr>
               <a:t>Write a short paragraph about my own hobbies using at least </a:t>
             </a:r>
-            <a:pPr algn="l" indent="0" marL="0">
-              <a:lnSpc>
-                <a:spcPts val="1680"/>
-              </a:lnSpc>
-              <a:buNone/>
-            </a:pPr>
             <a:r>
               <a:rPr lang="en-US" sz="1200" b="1" dirty="0">
                 <a:solidFill>
@@ -13630,12 +13384,6 @@
               </a:rPr>
               <a:t>2 of the 4 L7 grammar structures</a:t>
             </a:r>
-            <a:pPr algn="l" indent="0" marL="0">
-              <a:lnSpc>
-                <a:spcPts val="1680"/>
-              </a:lnSpc>
-              <a:buNone/>
-            </a:pPr>
             <a:r>
               <a:rPr lang="en-US" sz="1200" dirty="0">
                 <a:solidFill>
@@ -13647,12 +13395,6 @@
               </a:rPr>
               <a:t>: </a:t>
             </a:r>
-            <a:pPr algn="l" indent="0" marL="0">
-              <a:lnSpc>
-                <a:spcPts val="1680"/>
-              </a:lnSpc>
-              <a:buNone/>
-            </a:pPr>
             <a:r>
               <a:rPr lang="en-US" sz="1200" dirty="0">
                 <a:solidFill>
@@ -16463,6 +16205,53 @@
               </a:rPr>
               <a:t>Seen in: </a:t>
             </a:r>
+            <a:r>
+              <a:rPr lang="en-US" sz="1000" b="1" dirty="0">
+                <a:solidFill>
+                  <a:srgbClr val="C8943E"/>
+                </a:solidFill>
+                <a:latin typeface="Noto Sans SC" pitchFamily="34" charset="0"/>
+                <a:ea typeface="Noto Sans SC" pitchFamily="34" charset="-122"/>
+                <a:cs typeface="Noto Sans SC" pitchFamily="34" charset="-120"/>
+              </a:rPr>
+              <a:t>书包</a:t>
+            </a:r>
+            <a:r>
+              <a:rPr lang="en-US" sz="1000" dirty="0">
+                <a:solidFill>
+                  <a:srgbClr val="5B6677"/>
+                </a:solidFill>
+                <a:latin typeface="Noto Sans SC" pitchFamily="34" charset="0"/>
+                <a:ea typeface="Noto Sans SC" pitchFamily="34" charset="-122"/>
+                <a:cs typeface="Noto Sans SC" pitchFamily="34" charset="-120"/>
+              </a:rPr>
+              <a:t> (school bag)</a:t>
+            </a:r>
+            <a:endParaRPr lang="en-US" sz="1000" dirty="0"/>
+          </a:p>
+        </p:txBody>
+      </p:sp>
+      <p:sp>
+        <p:nvSpPr>
+          <p:cNvPr id="31" name="Text 29"/>
+          <p:cNvSpPr/>
+          <p:nvPr/>
+        </p:nvSpPr>
+        <p:spPr>
+          <a:xfrm>
+            <a:off x="8575923" y="1866602"/>
+            <a:ext cx="2979319" cy="171301"/>
+          </a:xfrm>
+          <a:prstGeom prst="rect">
+            <a:avLst/>
+          </a:prstGeom>
+          <a:noFill/>
+          <a:ln/>
+        </p:spPr>
+        <p:txBody>
+          <a:bodyPr wrap="square" lIns="0" tIns="0" rIns="0" bIns="0" rtlCol="0" anchor="t"/>
+          <a:lstStyle/>
+          <a:p>
             <a:pPr algn="l" indent="0" marL="0">
               <a:lnSpc>
                 <a:spcPts val="1350"/>
@@ -16470,23 +16259,6 @@
               <a:buNone/>
             </a:pPr>
             <a:r>
-              <a:rPr lang="en-US" sz="1000" b="1" dirty="0">
-                <a:solidFill>
-                  <a:srgbClr val="C8943E"/>
-                </a:solidFill>
-                <a:latin typeface="Noto Sans SC" pitchFamily="34" charset="0"/>
-                <a:ea typeface="Noto Sans SC" pitchFamily="34" charset="-122"/>
-                <a:cs typeface="Noto Sans SC" pitchFamily="34" charset="-120"/>
-              </a:rPr>
-              <a:t>书包</a:t>
-            </a:r>
-            <a:pPr algn="l" indent="0" marL="0">
-              <a:lnSpc>
-                <a:spcPts val="1350"/>
-              </a:lnSpc>
-              <a:buNone/>
-            </a:pPr>
-            <a:r>
               <a:rPr lang="en-US" sz="1000" dirty="0">
                 <a:solidFill>
                   <a:srgbClr val="5B6677"/>
@@ -16495,41 +16267,10 @@
                 <a:ea typeface="Noto Sans SC" pitchFamily="34" charset="-122"/>
                 <a:cs typeface="Noto Sans SC" pitchFamily="34" charset="-120"/>
               </a:rPr>
-              <a:t> (school bag)</a:t>
-            </a:r>
-            <a:endParaRPr lang="en-US" sz="1000" dirty="0"/>
-          </a:p>
-        </p:txBody>
-      </p:sp>
-      <p:sp>
-        <p:nvSpPr>
-          <p:cNvPr id="31" name="Text 29"/>
-          <p:cNvSpPr/>
-          <p:nvPr/>
-        </p:nvSpPr>
-        <p:spPr>
-          <a:xfrm>
-            <a:off x="8575923" y="1866602"/>
-            <a:ext cx="2979319" cy="171301"/>
-          </a:xfrm>
-          <a:prstGeom prst="rect">
-            <a:avLst/>
-          </a:prstGeom>
-          <a:noFill/>
-          <a:ln/>
-        </p:spPr>
-        <p:txBody>
-          <a:bodyPr wrap="square" lIns="0" tIns="0" rIns="0" bIns="0" rtlCol="0" anchor="t"/>
-          <a:lstStyle/>
-          <a:p>
-            <a:pPr algn="l" indent="0" marL="0">
-              <a:lnSpc>
-                <a:spcPts val="1350"/>
-              </a:lnSpc>
-              <a:buNone/>
-            </a:pPr>
-            <a:r>
-              <a:rPr lang="en-US" sz="1000" dirty="0">
+              <a:t>Rule: outer wrap 勹 </a:t>
+            </a:r>
+            <a:r>
+              <a:rPr lang="en-US" sz="1000" i="1" dirty="0">
                 <a:solidFill>
                   <a:srgbClr val="5B6677"/>
                 </a:solidFill>
@@ -16537,31 +16278,8 @@
                 <a:ea typeface="Noto Sans SC" pitchFamily="34" charset="-122"/>
                 <a:cs typeface="Noto Sans SC" pitchFamily="34" charset="-120"/>
               </a:rPr>
-              <a:t>Rule: outer wrap 勹 </a:t>
-            </a:r>
-            <a:pPr algn="l" indent="0" marL="0">
-              <a:lnSpc>
-                <a:spcPts val="1350"/>
-              </a:lnSpc>
-              <a:buNone/>
-            </a:pPr>
-            <a:r>
-              <a:rPr lang="en-US" sz="1000" i="1" dirty="0">
-                <a:solidFill>
-                  <a:srgbClr val="5B6677"/>
-                </a:solidFill>
-                <a:latin typeface="Noto Sans SC" pitchFamily="34" charset="0"/>
-                <a:ea typeface="Noto Sans SC" pitchFamily="34" charset="-122"/>
-                <a:cs typeface="Noto Sans SC" pitchFamily="34" charset="-120"/>
-              </a:rPr>
               <a:t>before</a:t>
             </a:r>
-            <a:pPr algn="l" indent="0" marL="0">
-              <a:lnSpc>
-                <a:spcPts val="1350"/>
-              </a:lnSpc>
-              <a:buNone/>
-            </a:pPr>
             <a:r>
               <a:rPr lang="en-US" sz="1000" dirty="0">
                 <a:solidFill>
@@ -17402,12 +17120,6 @@
               </a:rPr>
               <a:t>Seen in: </a:t>
             </a:r>
-            <a:pPr algn="l" indent="0" marL="0">
-              <a:lnSpc>
-                <a:spcPts val="1350"/>
-              </a:lnSpc>
-              <a:buNone/>
-            </a:pPr>
             <a:r>
               <a:rPr lang="en-US" sz="1000" b="1" dirty="0">
                 <a:solidFill>
@@ -17419,12 +17131,6 @@
               </a:rPr>
               <a:t>停止</a:t>
             </a:r>
-            <a:pPr algn="l" indent="0" marL="0">
-              <a:lnSpc>
-                <a:spcPts val="1350"/>
-              </a:lnSpc>
-              <a:buNone/>
-            </a:pPr>
             <a:r>
               <a:rPr lang="en-US" sz="1000" dirty="0">
                 <a:solidFill>
@@ -18151,12 +17857,6 @@
               </a:rPr>
               <a:t>Compare: </a:t>
             </a:r>
-            <a:pPr algn="l" indent="0" marL="0">
-              <a:lnSpc>
-                <a:spcPts val="1350"/>
-              </a:lnSpc>
-              <a:buNone/>
-            </a:pPr>
             <a:r>
               <a:rPr lang="en-US" sz="1000" b="1" dirty="0">
                 <a:solidFill>
@@ -18168,12 +17868,6 @@
               </a:rPr>
               <a:t>土</a:t>
             </a:r>
-            <a:pPr algn="l" indent="0" marL="0">
-              <a:lnSpc>
-                <a:spcPts val="1350"/>
-              </a:lnSpc>
-              <a:buNone/>
-            </a:pPr>
             <a:r>
               <a:rPr lang="en-US" sz="1000" dirty="0">
                 <a:solidFill>
@@ -18185,12 +17879,6 @@
               </a:rPr>
               <a:t> (soil) — top is </a:t>
             </a:r>
-            <a:pPr algn="l" indent="0" marL="0">
-              <a:lnSpc>
-                <a:spcPts val="1350"/>
-              </a:lnSpc>
-              <a:buNone/>
-            </a:pPr>
             <a:r>
               <a:rPr lang="en-US" sz="1000" i="1" dirty="0">
                 <a:solidFill>
@@ -18202,12 +17890,6 @@
               </a:rPr>
               <a:t>longer</a:t>
             </a:r>
-            <a:pPr algn="l" indent="0" marL="0">
-              <a:lnSpc>
-                <a:spcPts val="1350"/>
-              </a:lnSpc>
-              <a:buNone/>
-            </a:pPr>
             <a:r>
               <a:rPr lang="en-US" sz="1000" dirty="0">
                 <a:solidFill>
@@ -19090,6 +18772,86 @@
               </a:rPr>
               <a:t>Think: </a:t>
             </a:r>
+            <a:r>
+              <a:rPr lang="en-US" sz="1000" i="1" dirty="0">
+                <a:solidFill>
+                  <a:srgbClr val="5B6677"/>
+                </a:solidFill>
+                <a:latin typeface="Noto Sans SC" pitchFamily="34" charset="0"/>
+                <a:ea typeface="Noto Sans SC" pitchFamily="34" charset="-122"/>
+                <a:cs typeface="Noto Sans SC" pitchFamily="34" charset="-120"/>
+              </a:rPr>
+              <a:t>lid</a:t>
+            </a:r>
+            <a:r>
+              <a:rPr lang="en-US" sz="1000" dirty="0">
+                <a:solidFill>
+                  <a:srgbClr val="5B6677"/>
+                </a:solidFill>
+                <a:latin typeface="Noto Sans SC" pitchFamily="34" charset="0"/>
+                <a:ea typeface="Noto Sans SC" pitchFamily="34" charset="-122"/>
+                <a:cs typeface="Noto Sans SC" pitchFamily="34" charset="-120"/>
+              </a:rPr>
+              <a:t> + </a:t>
+            </a:r>
+            <a:r>
+              <a:rPr lang="en-US" sz="1000" i="1" dirty="0">
+                <a:solidFill>
+                  <a:srgbClr val="5B6677"/>
+                </a:solidFill>
+                <a:latin typeface="Noto Sans SC" pitchFamily="34" charset="0"/>
+                <a:ea typeface="Noto Sans SC" pitchFamily="34" charset="-122"/>
+                <a:cs typeface="Noto Sans SC" pitchFamily="34" charset="-120"/>
+              </a:rPr>
+              <a:t>container</a:t>
+            </a:r>
+            <a:r>
+              <a:rPr lang="en-US" sz="1000" dirty="0">
+                <a:solidFill>
+                  <a:srgbClr val="5B6677"/>
+                </a:solidFill>
+                <a:latin typeface="Noto Sans SC" pitchFamily="34" charset="0"/>
+                <a:ea typeface="Noto Sans SC" pitchFamily="34" charset="-122"/>
+                <a:cs typeface="Noto Sans SC" pitchFamily="34" charset="-120"/>
+              </a:rPr>
+              <a:t> + </a:t>
+            </a:r>
+            <a:r>
+              <a:rPr lang="en-US" sz="1000" i="1" dirty="0">
+                <a:solidFill>
+                  <a:srgbClr val="5B6677"/>
+                </a:solidFill>
+                <a:latin typeface="Noto Sans SC" pitchFamily="34" charset="0"/>
+                <a:ea typeface="Noto Sans SC" pitchFamily="34" charset="-122"/>
+                <a:cs typeface="Noto Sans SC" pitchFamily="34" charset="-120"/>
+              </a:rPr>
+              <a:t>feet</a:t>
+            </a:r>
+            <a:endParaRPr lang="en-US" sz="1000" dirty="0"/>
+          </a:p>
+        </p:txBody>
+      </p:sp>
+      <p:sp>
+        <p:nvSpPr>
+          <p:cNvPr id="96" name="Text 94"/>
+          <p:cNvSpPr/>
+          <p:nvPr/>
+        </p:nvSpPr>
+        <p:spPr>
+          <a:xfrm>
+            <a:off x="8575923" y="5018782"/>
+            <a:ext cx="2979319" cy="171301"/>
+          </a:xfrm>
+          <a:prstGeom prst="rect">
+            <a:avLst/>
+          </a:prstGeom>
+          <a:noFill/>
+          <a:ln/>
+        </p:spPr>
+        <p:txBody>
+          <a:bodyPr wrap="square" lIns="0" tIns="0" rIns="0" bIns="0" rtlCol="0" anchor="t"/>
+          <a:lstStyle/>
+          <a:p>
             <a:pPr algn="l" indent="0" marL="0">
               <a:lnSpc>
                 <a:spcPts val="1350"/>
@@ -19097,7 +18859,7 @@
               <a:buNone/>
             </a:pPr>
             <a:r>
-              <a:rPr lang="en-US" sz="1000" i="1" dirty="0">
+              <a:rPr lang="en-US" sz="1000" dirty="0">
                 <a:solidFill>
                   <a:srgbClr val="5B6677"/>
                 </a:solidFill>
@@ -19105,14 +18867,19 @@
                 <a:ea typeface="Noto Sans SC" pitchFamily="34" charset="-122"/>
                 <a:cs typeface="Noto Sans SC" pitchFamily="34" charset="-120"/>
               </a:rPr>
-              <a:t>lid</a:t>
-            </a:r>
-            <a:pPr algn="l" indent="0" marL="0">
-              <a:lnSpc>
-                <a:spcPts val="1350"/>
-              </a:lnSpc>
-              <a:buNone/>
-            </a:pPr>
+              <a:t>Seen in: </a:t>
+            </a:r>
+            <a:r>
+              <a:rPr lang="en-US" sz="1000" b="1" dirty="0">
+                <a:solidFill>
+                  <a:srgbClr val="C8943E"/>
+                </a:solidFill>
+                <a:latin typeface="Noto Sans SC" pitchFamily="34" charset="0"/>
+                <a:ea typeface="Noto Sans SC" pitchFamily="34" charset="-122"/>
+                <a:cs typeface="Noto Sans SC" pitchFamily="34" charset="-120"/>
+              </a:rPr>
+              <a:t>豆腐</a:t>
+            </a:r>
             <a:r>
               <a:rPr lang="en-US" sz="1000" dirty="0">
                 <a:solidFill>
@@ -19122,107 +18889,8 @@
                 <a:ea typeface="Noto Sans SC" pitchFamily="34" charset="-122"/>
                 <a:cs typeface="Noto Sans SC" pitchFamily="34" charset="-120"/>
               </a:rPr>
-              <a:t> + </a:t>
-            </a:r>
-            <a:pPr algn="l" indent="0" marL="0">
-              <a:lnSpc>
-                <a:spcPts val="1350"/>
-              </a:lnSpc>
-              <a:buNone/>
-            </a:pPr>
-            <a:r>
-              <a:rPr lang="en-US" sz="1000" i="1" dirty="0">
-                <a:solidFill>
-                  <a:srgbClr val="5B6677"/>
-                </a:solidFill>
-                <a:latin typeface="Noto Sans SC" pitchFamily="34" charset="0"/>
-                <a:ea typeface="Noto Sans SC" pitchFamily="34" charset="-122"/>
-                <a:cs typeface="Noto Sans SC" pitchFamily="34" charset="-120"/>
-              </a:rPr>
-              <a:t>container</a:t>
-            </a:r>
-            <a:pPr algn="l" indent="0" marL="0">
-              <a:lnSpc>
-                <a:spcPts val="1350"/>
-              </a:lnSpc>
-              <a:buNone/>
-            </a:pPr>
-            <a:r>
-              <a:rPr lang="en-US" sz="1000" dirty="0">
-                <a:solidFill>
-                  <a:srgbClr val="5B6677"/>
-                </a:solidFill>
-                <a:latin typeface="Noto Sans SC" pitchFamily="34" charset="0"/>
-                <a:ea typeface="Noto Sans SC" pitchFamily="34" charset="-122"/>
-                <a:cs typeface="Noto Sans SC" pitchFamily="34" charset="-120"/>
-              </a:rPr>
-              <a:t> + </a:t>
-            </a:r>
-            <a:pPr algn="l" indent="0" marL="0">
-              <a:lnSpc>
-                <a:spcPts val="1350"/>
-              </a:lnSpc>
-              <a:buNone/>
-            </a:pPr>
-            <a:r>
-              <a:rPr lang="en-US" sz="1000" i="1" dirty="0">
-                <a:solidFill>
-                  <a:srgbClr val="5B6677"/>
-                </a:solidFill>
-                <a:latin typeface="Noto Sans SC" pitchFamily="34" charset="0"/>
-                <a:ea typeface="Noto Sans SC" pitchFamily="34" charset="-122"/>
-                <a:cs typeface="Noto Sans SC" pitchFamily="34" charset="-120"/>
-              </a:rPr>
-              <a:t>feet</a:t>
-            </a:r>
-            <a:endParaRPr lang="en-US" sz="1000" dirty="0"/>
-          </a:p>
-        </p:txBody>
-      </p:sp>
-      <p:sp>
-        <p:nvSpPr>
-          <p:cNvPr id="96" name="Text 94"/>
-          <p:cNvSpPr/>
-          <p:nvPr/>
-        </p:nvSpPr>
-        <p:spPr>
-          <a:xfrm>
-            <a:off x="8575923" y="5018782"/>
-            <a:ext cx="2979319" cy="171301"/>
-          </a:xfrm>
-          <a:prstGeom prst="rect">
-            <a:avLst/>
-          </a:prstGeom>
-          <a:noFill/>
-          <a:ln/>
-        </p:spPr>
-        <p:txBody>
-          <a:bodyPr wrap="square" lIns="0" tIns="0" rIns="0" bIns="0" rtlCol="0" anchor="t"/>
-          <a:lstStyle/>
-          <a:p>
-            <a:pPr algn="l" indent="0" marL="0">
-              <a:lnSpc>
-                <a:spcPts val="1350"/>
-              </a:lnSpc>
-              <a:buNone/>
-            </a:pPr>
-            <a:r>
-              <a:rPr lang="en-US" sz="1000" dirty="0">
-                <a:solidFill>
-                  <a:srgbClr val="5B6677"/>
-                </a:solidFill>
-                <a:latin typeface="Noto Sans SC" pitchFamily="34" charset="0"/>
-                <a:ea typeface="Noto Sans SC" pitchFamily="34" charset="-122"/>
-                <a:cs typeface="Noto Sans SC" pitchFamily="34" charset="-120"/>
-              </a:rPr>
-              <a:t>Seen in: </a:t>
-            </a:r>
-            <a:pPr algn="l" indent="0" marL="0">
-              <a:lnSpc>
-                <a:spcPts val="1350"/>
-              </a:lnSpc>
-              <a:buNone/>
-            </a:pPr>
+              <a:t> (tofu), </a:t>
+            </a:r>
             <a:r>
               <a:rPr lang="en-US" sz="1000" b="1" dirty="0">
                 <a:solidFill>
@@ -19232,48 +18900,8 @@
                 <a:ea typeface="Noto Sans SC" pitchFamily="34" charset="-122"/>
                 <a:cs typeface="Noto Sans SC" pitchFamily="34" charset="-120"/>
               </a:rPr>
-              <a:t>豆腐</a:t>
-            </a:r>
-            <a:pPr algn="l" indent="0" marL="0">
-              <a:lnSpc>
-                <a:spcPts val="1350"/>
-              </a:lnSpc>
-              <a:buNone/>
-            </a:pPr>
-            <a:r>
-              <a:rPr lang="en-US" sz="1000" dirty="0">
-                <a:solidFill>
-                  <a:srgbClr val="5B6677"/>
-                </a:solidFill>
-                <a:latin typeface="Noto Sans SC" pitchFamily="34" charset="0"/>
-                <a:ea typeface="Noto Sans SC" pitchFamily="34" charset="-122"/>
-                <a:cs typeface="Noto Sans SC" pitchFamily="34" charset="-120"/>
-              </a:rPr>
-              <a:t> (tofu), </a:t>
-            </a:r>
-            <a:pPr algn="l" indent="0" marL="0">
-              <a:lnSpc>
-                <a:spcPts val="1350"/>
-              </a:lnSpc>
-              <a:buNone/>
-            </a:pPr>
-            <a:r>
-              <a:rPr lang="en-US" sz="1000" b="1" dirty="0">
-                <a:solidFill>
-                  <a:srgbClr val="C8943E"/>
-                </a:solidFill>
-                <a:latin typeface="Noto Sans SC" pitchFamily="34" charset="0"/>
-                <a:ea typeface="Noto Sans SC" pitchFamily="34" charset="-122"/>
-                <a:cs typeface="Noto Sans SC" pitchFamily="34" charset="-120"/>
-              </a:rPr>
               <a:t>豆浆</a:t>
             </a:r>
-            <a:pPr algn="l" indent="0" marL="0">
-              <a:lnSpc>
-                <a:spcPts val="1350"/>
-              </a:lnSpc>
-              <a:buNone/>
-            </a:pPr>
             <a:r>
               <a:rPr lang="en-US" sz="1000" dirty="0">
                 <a:solidFill>
@@ -19813,6 +19441,53 @@
               </a:rPr>
               <a:t>我有很多爱好。我喜欢</a:t>
             </a:r>
+            <a:r>
+              <a:rPr lang="en-US" sz="1800" b="1" dirty="0">
+                <a:solidFill>
+                  <a:srgbClr val="3A7D8C"/>
+                </a:solidFill>
+                <a:latin typeface="Noto Serif SC" pitchFamily="34" charset="0"/>
+                <a:ea typeface="Noto Serif SC" pitchFamily="34" charset="-122"/>
+                <a:cs typeface="Noto Serif SC" pitchFamily="34" charset="-120"/>
+              </a:rPr>
+              <a:t>一边</a:t>
+            </a:r>
+            <a:r>
+              <a:rPr lang="en-US" sz="1800" dirty="0">
+                <a:solidFill>
+                  <a:srgbClr val="1E2A38"/>
+                </a:solidFill>
+                <a:latin typeface="Noto Serif SC" pitchFamily="34" charset="0"/>
+                <a:ea typeface="Noto Serif SC" pitchFamily="34" charset="-122"/>
+                <a:cs typeface="Noto Serif SC" pitchFamily="34" charset="-120"/>
+              </a:rPr>
+              <a:t>听音乐，</a:t>
+            </a:r>
+            <a:r>
+              <a:rPr lang="en-US" sz="1800" b="1" dirty="0">
+                <a:solidFill>
+                  <a:srgbClr val="3A7D8C"/>
+                </a:solidFill>
+                <a:latin typeface="Noto Serif SC" pitchFamily="34" charset="0"/>
+                <a:ea typeface="Noto Serif SC" pitchFamily="34" charset="-122"/>
+                <a:cs typeface="Noto Serif SC" pitchFamily="34" charset="-120"/>
+              </a:rPr>
+              <a:t>一边</a:t>
+            </a:r>
+            <a:r>
+              <a:rPr lang="en-US" sz="1800" dirty="0">
+                <a:solidFill>
+                  <a:srgbClr val="1E2A38"/>
+                </a:solidFill>
+                <a:latin typeface="Noto Serif SC" pitchFamily="34" charset="0"/>
+                <a:ea typeface="Noto Serif SC" pitchFamily="34" charset="-122"/>
+                <a:cs typeface="Noto Serif SC" pitchFamily="34" charset="-120"/>
+              </a:rPr>
+              <a:t>画画儿。</a:t>
+            </a:r>
+            <a:endParaRPr lang="en-US" sz="1800" dirty="0"/>
+          </a:p>
+          <a:p>
             <a:pPr algn="l" indent="0" marL="0">
               <a:lnSpc>
                 <a:spcPts val="3600"/>
@@ -19820,16 +19495,19 @@
               <a:buNone/>
             </a:pPr>
             <a:r>
-              <a:rPr lang="en-US" sz="1800" b="1" dirty="0">
-                <a:solidFill>
-                  <a:srgbClr val="3A7D8C"/>
+              <a:rPr lang="en-US" sz="1800" dirty="0">
+                <a:solidFill>
+                  <a:srgbClr val="1E2A38"/>
                 </a:solidFill>
                 <a:latin typeface="Noto Serif SC" pitchFamily="34" charset="0"/>
                 <a:ea typeface="Noto Serif SC" pitchFamily="34" charset="-122"/>
                 <a:cs typeface="Noto Serif SC" pitchFamily="34" charset="-120"/>
               </a:rPr>
-              <a:t>一边</a:t>
-            </a:r>
+              <a:t> 油画儿、国画儿，我</a:t>
+            </a:r>
+            <a:endParaRPr lang="en-US" sz="1800" dirty="0"/>
+          </a:p>
+          <a:p>
             <a:pPr algn="l" indent="0" marL="0">
               <a:lnSpc>
                 <a:spcPts val="3600"/>
@@ -19837,16 +19515,30 @@
               <a:buNone/>
             </a:pPr>
             <a:r>
-              <a:rPr lang="en-US" sz="1800" dirty="0">
-                <a:solidFill>
-                  <a:srgbClr val="1E2A38"/>
+              <a:rPr lang="en-US" sz="1800" b="1" dirty="0">
+                <a:solidFill>
+                  <a:srgbClr val="C8943E"/>
                 </a:solidFill>
                 <a:latin typeface="Noto Serif SC" pitchFamily="34" charset="0"/>
                 <a:ea typeface="Noto Serif SC" pitchFamily="34" charset="-122"/>
                 <a:cs typeface="Noto Serif SC" pitchFamily="34" charset="-120"/>
               </a:rPr>
-              <a:t>听音乐，</a:t>
-            </a:r>
+              <a:t>都</a:t>
+            </a:r>
+            <a:r>
+              <a:rPr lang="en-US" sz="1800" dirty="0">
+                <a:solidFill>
+                  <a:srgbClr val="1E2A38"/>
+                </a:solidFill>
+                <a:latin typeface="Noto Serif SC" pitchFamily="34" charset="0"/>
+                <a:ea typeface="Noto Serif SC" pitchFamily="34" charset="-122"/>
+                <a:cs typeface="Noto Serif SC" pitchFamily="34" charset="-120"/>
+              </a:rPr>
+              <a:t>喜欢画。</a:t>
+            </a:r>
+            <a:endParaRPr lang="en-US" sz="1800" dirty="0"/>
+          </a:p>
+          <a:p>
             <a:pPr algn="l" indent="0" marL="0">
               <a:lnSpc>
                 <a:spcPts val="3600"/>
@@ -19854,16 +19546,19 @@
               <a:buNone/>
             </a:pPr>
             <a:r>
-              <a:rPr lang="en-US" sz="1800" b="1" dirty="0">
-                <a:solidFill>
-                  <a:srgbClr val="3A7D8C"/>
+              <a:rPr lang="en-US" sz="1800" dirty="0">
+                <a:solidFill>
+                  <a:srgbClr val="1E2A38"/>
                 </a:solidFill>
                 <a:latin typeface="Noto Serif SC" pitchFamily="34" charset="0"/>
                 <a:ea typeface="Noto Serif SC" pitchFamily="34" charset="-122"/>
                 <a:cs typeface="Noto Serif SC" pitchFamily="34" charset="-120"/>
               </a:rPr>
-              <a:t>一边</a:t>
-            </a:r>
+              <a:t> 我每天画</a:t>
+            </a:r>
+            <a:endParaRPr lang="en-US" sz="1800" dirty="0"/>
+          </a:p>
+          <a:p>
             <a:pPr algn="l" indent="0" marL="0">
               <a:lnSpc>
                 <a:spcPts val="3600"/>
@@ -19871,15 +19566,26 @@
               <a:buNone/>
             </a:pPr>
             <a:r>
-              <a:rPr lang="en-US" sz="1800" dirty="0">
-                <a:solidFill>
-                  <a:srgbClr val="1E2A38"/>
+              <a:rPr lang="en-US" sz="1800" b="1" dirty="0">
+                <a:solidFill>
+                  <a:srgbClr val="D4756B"/>
                 </a:solidFill>
                 <a:latin typeface="Noto Serif SC" pitchFamily="34" charset="0"/>
                 <a:ea typeface="Noto Serif SC" pitchFamily="34" charset="-122"/>
                 <a:cs typeface="Noto Serif SC" pitchFamily="34" charset="-120"/>
               </a:rPr>
-              <a:t>画画儿。</a:t>
+              <a:t>半个小时</a:t>
+            </a:r>
+            <a:r>
+              <a:rPr lang="en-US" sz="1800" dirty="0">
+                <a:solidFill>
+                  <a:srgbClr val="1E2A38"/>
+                </a:solidFill>
+                <a:latin typeface="Noto Serif SC" pitchFamily="34" charset="0"/>
+                <a:ea typeface="Noto Serif SC" pitchFamily="34" charset="-122"/>
+                <a:cs typeface="Noto Serif SC" pitchFamily="34" charset="-120"/>
+              </a:rPr>
+              <a:t>的画儿。</a:t>
             </a:r>
             <a:endParaRPr lang="en-US" sz="1800" dirty="0"/>
           </a:p>
@@ -19899,7 +19605,7 @@
                 <a:ea typeface="Noto Serif SC" pitchFamily="34" charset="-122"/>
                 <a:cs typeface="Noto Serif SC" pitchFamily="34" charset="-120"/>
               </a:rPr>
-              <a:t> 油画儿、国画儿，我</a:t>
+              <a:t> 我现在</a:t>
             </a:r>
             <a:endParaRPr lang="en-US" sz="1800" dirty="0"/>
           </a:p>
@@ -19913,14 +19619,28 @@
             <a:r>
               <a:rPr lang="en-US" sz="1800" b="1" dirty="0">
                 <a:solidFill>
-                  <a:srgbClr val="C8943E"/>
+                  <a:srgbClr val="3A8A55"/>
                 </a:solidFill>
                 <a:latin typeface="Noto Serif SC" pitchFamily="34" charset="0"/>
                 <a:ea typeface="Noto Serif SC" pitchFamily="34" charset="-122"/>
                 <a:cs typeface="Noto Serif SC" pitchFamily="34" charset="-120"/>
               </a:rPr>
-              <a:t>都</a:t>
-            </a:r>
+              <a:t>正在</a:t>
+            </a:r>
+            <a:r>
+              <a:rPr lang="en-US" sz="1800" dirty="0">
+                <a:solidFill>
+                  <a:srgbClr val="1E2A38"/>
+                </a:solidFill>
+                <a:latin typeface="Noto Serif SC" pitchFamily="34" charset="0"/>
+                <a:ea typeface="Noto Serif SC" pitchFamily="34" charset="-122"/>
+                <a:cs typeface="Noto Serif SC" pitchFamily="34" charset="-120"/>
+              </a:rPr>
+              <a:t>学画国画儿。</a:t>
+            </a:r>
+            <a:endParaRPr lang="en-US" sz="1800" dirty="0"/>
+          </a:p>
+          <a:p>
             <a:pPr algn="l" indent="0" marL="0">
               <a:lnSpc>
                 <a:spcPts val="3600"/>
@@ -19936,7 +19656,7 @@
                 <a:ea typeface="Noto Serif SC" pitchFamily="34" charset="-122"/>
                 <a:cs typeface="Noto Serif SC" pitchFamily="34" charset="-120"/>
               </a:rPr>
-              <a:t>喜欢画。</a:t>
+              <a:t> 我也喜欢读书。我每天读</a:t>
             </a:r>
             <a:endParaRPr lang="en-US" sz="1800" dirty="0"/>
           </a:p>
@@ -19948,156 +19668,16 @@
               <a:buNone/>
             </a:pPr>
             <a:r>
-              <a:rPr lang="en-US" sz="1800" dirty="0">
-                <a:solidFill>
-                  <a:srgbClr val="1E2A38"/>
+              <a:rPr lang="en-US" sz="1800" b="1" dirty="0">
+                <a:solidFill>
+                  <a:srgbClr val="D4756B"/>
                 </a:solidFill>
                 <a:latin typeface="Noto Serif SC" pitchFamily="34" charset="0"/>
                 <a:ea typeface="Noto Serif SC" pitchFamily="34" charset="-122"/>
                 <a:cs typeface="Noto Serif SC" pitchFamily="34" charset="-120"/>
               </a:rPr>
-              <a:t> 我每天画</a:t>
-            </a:r>
-            <a:endParaRPr lang="en-US" sz="1800" dirty="0"/>
-          </a:p>
-          <a:p>
-            <a:pPr algn="l" indent="0" marL="0">
-              <a:lnSpc>
-                <a:spcPts val="3600"/>
-              </a:lnSpc>
-              <a:buNone/>
-            </a:pPr>
-            <a:r>
-              <a:rPr lang="en-US" sz="1800" b="1" dirty="0">
-                <a:solidFill>
-                  <a:srgbClr val="D4756B"/>
-                </a:solidFill>
-                <a:latin typeface="Noto Serif SC" pitchFamily="34" charset="0"/>
-                <a:ea typeface="Noto Serif SC" pitchFamily="34" charset="-122"/>
-                <a:cs typeface="Noto Serif SC" pitchFamily="34" charset="-120"/>
-              </a:rPr>
-              <a:t>半个小时</a:t>
-            </a:r>
-            <a:pPr algn="l" indent="0" marL="0">
-              <a:lnSpc>
-                <a:spcPts val="3600"/>
-              </a:lnSpc>
-              <a:buNone/>
-            </a:pPr>
-            <a:r>
-              <a:rPr lang="en-US" sz="1800" dirty="0">
-                <a:solidFill>
-                  <a:srgbClr val="1E2A38"/>
-                </a:solidFill>
-                <a:latin typeface="Noto Serif SC" pitchFamily="34" charset="0"/>
-                <a:ea typeface="Noto Serif SC" pitchFamily="34" charset="-122"/>
-                <a:cs typeface="Noto Serif SC" pitchFamily="34" charset="-120"/>
-              </a:rPr>
-              <a:t>的画儿。</a:t>
-            </a:r>
-            <a:endParaRPr lang="en-US" sz="1800" dirty="0"/>
-          </a:p>
-          <a:p>
-            <a:pPr algn="l" indent="0" marL="0">
-              <a:lnSpc>
-                <a:spcPts val="3600"/>
-              </a:lnSpc>
-              <a:buNone/>
-            </a:pPr>
-            <a:r>
-              <a:rPr lang="en-US" sz="1800" dirty="0">
-                <a:solidFill>
-                  <a:srgbClr val="1E2A38"/>
-                </a:solidFill>
-                <a:latin typeface="Noto Serif SC" pitchFamily="34" charset="0"/>
-                <a:ea typeface="Noto Serif SC" pitchFamily="34" charset="-122"/>
-                <a:cs typeface="Noto Serif SC" pitchFamily="34" charset="-120"/>
-              </a:rPr>
-              <a:t> 我现在</a:t>
-            </a:r>
-            <a:endParaRPr lang="en-US" sz="1800" dirty="0"/>
-          </a:p>
-          <a:p>
-            <a:pPr algn="l" indent="0" marL="0">
-              <a:lnSpc>
-                <a:spcPts val="3600"/>
-              </a:lnSpc>
-              <a:buNone/>
-            </a:pPr>
-            <a:r>
-              <a:rPr lang="en-US" sz="1800" b="1" dirty="0">
-                <a:solidFill>
-                  <a:srgbClr val="3A8A55"/>
-                </a:solidFill>
-                <a:latin typeface="Noto Serif SC" pitchFamily="34" charset="0"/>
-                <a:ea typeface="Noto Serif SC" pitchFamily="34" charset="-122"/>
-                <a:cs typeface="Noto Serif SC" pitchFamily="34" charset="-120"/>
-              </a:rPr>
-              <a:t>正在</a:t>
-            </a:r>
-            <a:pPr algn="l" indent="0" marL="0">
-              <a:lnSpc>
-                <a:spcPts val="3600"/>
-              </a:lnSpc>
-              <a:buNone/>
-            </a:pPr>
-            <a:r>
-              <a:rPr lang="en-US" sz="1800" dirty="0">
-                <a:solidFill>
-                  <a:srgbClr val="1E2A38"/>
-                </a:solidFill>
-                <a:latin typeface="Noto Serif SC" pitchFamily="34" charset="0"/>
-                <a:ea typeface="Noto Serif SC" pitchFamily="34" charset="-122"/>
-                <a:cs typeface="Noto Serif SC" pitchFamily="34" charset="-120"/>
-              </a:rPr>
-              <a:t>学画国画儿。</a:t>
-            </a:r>
-            <a:endParaRPr lang="en-US" sz="1800" dirty="0"/>
-          </a:p>
-          <a:p>
-            <a:pPr algn="l" indent="0" marL="0">
-              <a:lnSpc>
-                <a:spcPts val="3600"/>
-              </a:lnSpc>
-              <a:buNone/>
-            </a:pPr>
-            <a:r>
-              <a:rPr lang="en-US" sz="1800" dirty="0">
-                <a:solidFill>
-                  <a:srgbClr val="1E2A38"/>
-                </a:solidFill>
-                <a:latin typeface="Noto Serif SC" pitchFamily="34" charset="0"/>
-                <a:ea typeface="Noto Serif SC" pitchFamily="34" charset="-122"/>
-                <a:cs typeface="Noto Serif SC" pitchFamily="34" charset="-120"/>
-              </a:rPr>
-              <a:t> 我也喜欢读书。我每天读</a:t>
-            </a:r>
-            <a:endParaRPr lang="en-US" sz="1800" dirty="0"/>
-          </a:p>
-          <a:p>
-            <a:pPr algn="l" indent="0" marL="0">
-              <a:lnSpc>
-                <a:spcPts val="3600"/>
-              </a:lnSpc>
-              <a:buNone/>
-            </a:pPr>
-            <a:r>
-              <a:rPr lang="en-US" sz="1800" b="1" dirty="0">
-                <a:solidFill>
-                  <a:srgbClr val="D4756B"/>
-                </a:solidFill>
-                <a:latin typeface="Noto Serif SC" pitchFamily="34" charset="0"/>
-                <a:ea typeface="Noto Serif SC" pitchFamily="34" charset="-122"/>
-                <a:cs typeface="Noto Serif SC" pitchFamily="34" charset="-120"/>
-              </a:rPr>
               <a:t>一个小时</a:t>
             </a:r>
-            <a:pPr algn="l" indent="0" marL="0">
-              <a:lnSpc>
-                <a:spcPts val="3600"/>
-              </a:lnSpc>
-              <a:buNone/>
-            </a:pPr>
             <a:r>
               <a:rPr lang="en-US" sz="1800" dirty="0">
                 <a:solidFill>
@@ -21437,15 +21017,6 @@
               </a:rPr>
               <a:t>Which of today's 4 characters has the </a:t>
             </a:r>
-            <a:pPr algn="l" indent="0" marL="0">
-              <a:lnSpc>
-                <a:spcPts val="2030"/>
-              </a:lnSpc>
-              <a:spcAft>
-                <a:spcPts val="900"/>
-              </a:spcAft>
-              <a:buNone/>
-            </a:pPr>
             <a:r>
               <a:rPr lang="en-US" sz="1400" b="1" dirty="0">
                 <a:solidFill>
@@ -21457,15 +21028,6 @@
               </a:rPr>
               <a:t>fewest strokes</a:t>
             </a:r>
-            <a:pPr algn="l" indent="0" marL="0">
-              <a:lnSpc>
-                <a:spcPts val="2030"/>
-              </a:lnSpc>
-              <a:spcAft>
-                <a:spcPts val="900"/>
-              </a:spcAft>
-              <a:buNone/>
-            </a:pPr>
             <a:r>
               <a:rPr lang="en-US" sz="1400" dirty="0">
                 <a:solidFill>
@@ -22139,15 +21701,6 @@
               </a:rPr>
               <a:t>Which character looks like </a:t>
             </a:r>
-            <a:pPr algn="l" indent="0" marL="0">
-              <a:lnSpc>
-                <a:spcPts val="2030"/>
-              </a:lnSpc>
-              <a:spcAft>
-                <a:spcPts val="900"/>
-              </a:spcAft>
-              <a:buNone/>
-            </a:pPr>
             <a:r>
               <a:rPr lang="en-US" sz="1400" b="1" dirty="0">
                 <a:solidFill>
@@ -22159,15 +21712,6 @@
               </a:rPr>
               <a:t>"a container with a lid and feet"</a:t>
             </a:r>
-            <a:pPr algn="l" indent="0" marL="0">
-              <a:lnSpc>
-                <a:spcPts val="2030"/>
-              </a:lnSpc>
-              <a:spcAft>
-                <a:spcPts val="900"/>
-              </a:spcAft>
-              <a:buNone/>
-            </a:pPr>
             <a:r>
               <a:rPr lang="en-US" sz="1400" dirty="0">
                 <a:solidFill>
@@ -23530,12 +23074,6 @@
               </a:rPr>
               <a:t>士 (shì)</a:t>
             </a:r>
-            <a:pPr algn="l" indent="0" marL="0">
-              <a:lnSpc>
-                <a:spcPts val="2030"/>
-              </a:lnSpc>
-              <a:buNone/>
-            </a:pPr>
             <a:r>
               <a:rPr lang="en-US" sz="1400" dirty="0">
                 <a:solidFill>
@@ -23547,12 +23085,6 @@
               </a:rPr>
               <a:t> — only </a:t>
             </a:r>
-            <a:pPr algn="l" indent="0" marL="0">
-              <a:lnSpc>
-                <a:spcPts val="2030"/>
-              </a:lnSpc>
-              <a:buNone/>
-            </a:pPr>
             <a:r>
               <a:rPr lang="en-US" sz="1400" b="1" dirty="0">
                 <a:solidFill>
@@ -23564,12 +23096,6 @@
               </a:rPr>
               <a:t>3 strokes</a:t>
             </a:r>
-            <a:pPr algn="l" indent="0" marL="0">
-              <a:lnSpc>
-                <a:spcPts val="2030"/>
-              </a:lnSpc>
-              <a:buNone/>
-            </a:pPr>
             <a:r>
               <a:rPr lang="en-US" sz="1400" dirty="0">
                 <a:solidFill>
@@ -23931,12 +23457,6 @@
               </a:rPr>
               <a:t>豆 (dòu)</a:t>
             </a:r>
-            <a:pPr algn="l" indent="0" marL="0">
-              <a:lnSpc>
-                <a:spcPts val="2030"/>
-              </a:lnSpc>
-              <a:buNone/>
-            </a:pPr>
             <a:r>
               <a:rPr lang="en-US" sz="1400" dirty="0">
                 <a:solidFill>
@@ -24214,12 +23734,6 @@
               </a:rPr>
               <a:t>4 structures</a:t>
             </a:r>
-            <a:pPr algn="l" indent="0" marL="0">
-              <a:lnSpc>
-                <a:spcPts val="2030"/>
-              </a:lnSpc>
-              <a:buNone/>
-            </a:pPr>
             <a:r>
               <a:rPr lang="en-US" sz="1400" dirty="0">
                 <a:solidFill>
@@ -26710,15 +26224,6 @@
               </a:rPr>
               <a:t>Write each character </a:t>
             </a:r>
-            <a:pPr algn="l" indent="0" marL="0">
-              <a:lnSpc>
-                <a:spcPts val="1450"/>
-              </a:lnSpc>
-              <a:spcAft>
-                <a:spcPts val="500"/>
-              </a:spcAft>
-              <a:buNone/>
-            </a:pPr>
             <a:r>
               <a:rPr lang="en-US" sz="1000" b="1" dirty="0">
                 <a:solidFill>
@@ -26730,15 +26235,6 @@
               </a:rPr>
               <a:t>5 times</a:t>
             </a:r>
-            <a:pPr algn="l" indent="0" marL="0">
-              <a:lnSpc>
-                <a:spcPts val="1450"/>
-              </a:lnSpc>
-              <a:spcAft>
-                <a:spcPts val="500"/>
-              </a:spcAft>
-              <a:buNone/>
-            </a:pPr>
             <a:r>
               <a:rPr lang="en-US" sz="1000" dirty="0">
                 <a:solidFill>
@@ -26774,15 +26270,6 @@
               </a:rPr>
               <a:t>Write the </a:t>
             </a:r>
-            <a:pPr algn="l" indent="0" marL="0">
-              <a:lnSpc>
-                <a:spcPts val="1450"/>
-              </a:lnSpc>
-              <a:spcAft>
-                <a:spcPts val="500"/>
-              </a:spcAft>
-              <a:buNone/>
-            </a:pPr>
             <a:r>
               <a:rPr lang="en-US" sz="1000" b="1" dirty="0">
                 <a:solidFill>
@@ -26794,15 +26281,6 @@
               </a:rPr>
               <a:t>pinyin and English meaning</a:t>
             </a:r>
-            <a:pPr algn="l" indent="0" marL="0">
-              <a:lnSpc>
-                <a:spcPts val="1450"/>
-              </a:lnSpc>
-              <a:spcAft>
-                <a:spcPts val="500"/>
-              </a:spcAft>
-              <a:buNone/>
-            </a:pPr>
             <a:r>
               <a:rPr lang="en-US" sz="1000" dirty="0">
                 <a:solidFill>
